--- a/assets/powerpoints/module-n3-vetements/B2-la-couleur-apres-le-vetement.pptx
+++ b/assets/powerpoints/module-n3-vetements/B2-la-couleur-apres-le-vetement.pptx
@@ -9059,7 +9059,79 @@
                 </a:solidFill>
                 <a:latin typeface="Verdana"/>
               </a:rPr>
-              <a:t>Elles finissent déjà par un e : au féminin, on n'ajoute rien. « Une tuque &lt;b&gt;rouge&lt;/b&gt; », « des mitaines &lt;b&gt;rouges&lt;/b&gt; » — seul le s du pluriel s'ajoute. Deux autres ne bougent pas du tout, parce qu'elles viennent d'un nom de chose : &lt;b&gt;marine&lt;/b&gt; (la mer) et &lt;b&gt;marron&lt;/b&gt; (le fruit).</a:t>
+              <a:t>Elles finissent déjà par un e : au féminin, on n'ajoute rien. « Une tuque </a:t>
+            </a:r>
+            <a:r>
+              <a:rPr sz="2000" b="1" i="0">
+                <a:solidFill>
+                  <a:srgbClr val="4B4F52"/>
+                </a:solidFill>
+                <a:latin typeface="Verdana"/>
+              </a:rPr>
+              <a:t>rouge</a:t>
+            </a:r>
+            <a:r>
+              <a:rPr sz="2000" b="0" i="0">
+                <a:solidFill>
+                  <a:srgbClr val="4B4F52"/>
+                </a:solidFill>
+                <a:latin typeface="Verdana"/>
+              </a:rPr>
+              <a:t> », « des mitaines </a:t>
+            </a:r>
+            <a:r>
+              <a:rPr sz="2000" b="1" i="0">
+                <a:solidFill>
+                  <a:srgbClr val="4B4F52"/>
+                </a:solidFill>
+                <a:latin typeface="Verdana"/>
+              </a:rPr>
+              <a:t>rouges</a:t>
+            </a:r>
+            <a:r>
+              <a:rPr sz="2000" b="0" i="0">
+                <a:solidFill>
+                  <a:srgbClr val="4B4F52"/>
+                </a:solidFill>
+                <a:latin typeface="Verdana"/>
+              </a:rPr>
+              <a:t> » — seul le s du pluriel s'ajoute. Deux autres ne bougent pas du tout, parce qu'elles viennent d'un nom de chose : </a:t>
+            </a:r>
+            <a:r>
+              <a:rPr sz="2000" b="1" i="0">
+                <a:solidFill>
+                  <a:srgbClr val="4B4F52"/>
+                </a:solidFill>
+                <a:latin typeface="Verdana"/>
+              </a:rPr>
+              <a:t>marine</a:t>
+            </a:r>
+            <a:r>
+              <a:rPr sz="2000" b="0" i="0">
+                <a:solidFill>
+                  <a:srgbClr val="4B4F52"/>
+                </a:solidFill>
+                <a:latin typeface="Verdana"/>
+              </a:rPr>
+              <a:t> (la mer) et </a:t>
+            </a:r>
+            <a:r>
+              <a:rPr sz="2000" b="1" i="0">
+                <a:solidFill>
+                  <a:srgbClr val="4B4F52"/>
+                </a:solidFill>
+                <a:latin typeface="Verdana"/>
+              </a:rPr>
+              <a:t>marron</a:t>
+            </a:r>
+            <a:r>
+              <a:rPr sz="2000" b="0" i="0">
+                <a:solidFill>
+                  <a:srgbClr val="4B4F52"/>
+                </a:solidFill>
+                <a:latin typeface="Verdana"/>
+              </a:rPr>
+              <a:t> (le fruit).</a:t>
             </a:r>
           </a:p>
         </p:txBody>
@@ -9399,7 +9471,43 @@
                 </a:solidFill>
                 <a:latin typeface="Verdana"/>
               </a:rPr>
-              <a:t>Rien ne s'ajoute : &lt;b&gt;un manteau noir&lt;/b&gt;, &lt;b&gt;un chandail vert&lt;/b&gt;. La couleur reste comme dans le dictionnaire.</a:t>
+              <a:t>Rien ne s'ajoute : </a:t>
+            </a:r>
+            <a:r>
+              <a:rPr sz="1500" b="1" i="0">
+                <a:solidFill>
+                  <a:srgbClr val="3A3D40"/>
+                </a:solidFill>
+                <a:latin typeface="Verdana"/>
+              </a:rPr>
+              <a:t>un manteau noir</a:t>
+            </a:r>
+            <a:r>
+              <a:rPr sz="1500" b="0" i="0">
+                <a:solidFill>
+                  <a:srgbClr val="3A3D40"/>
+                </a:solidFill>
+                <a:latin typeface="Verdana"/>
+              </a:rPr>
+              <a:t>, </a:t>
+            </a:r>
+            <a:r>
+              <a:rPr sz="1500" b="1" i="0">
+                <a:solidFill>
+                  <a:srgbClr val="3A3D40"/>
+                </a:solidFill>
+                <a:latin typeface="Verdana"/>
+              </a:rPr>
+              <a:t>un chandail vert</a:t>
+            </a:r>
+            <a:r>
+              <a:rPr sz="1500" b="0" i="0">
+                <a:solidFill>
+                  <a:srgbClr val="3A3D40"/>
+                </a:solidFill>
+                <a:latin typeface="Verdana"/>
+              </a:rPr>
+              <a:t>. La couleur reste comme dans le dictionnaire.</a:t>
             </a:r>
           </a:p>
         </p:txBody>
@@ -9523,7 +9631,43 @@
                 </a:solidFill>
                 <a:latin typeface="Verdana"/>
               </a:rPr>
-              <a:t>On ajoute un e : &lt;b&gt;une tuque noire&lt;/b&gt;, &lt;b&gt;une jupe verte&lt;/b&gt;. Et souvent, la consonne d'avant se met à sonner : « gri » devient « grize ».</a:t>
+              <a:t>On ajoute un e : </a:t>
+            </a:r>
+            <a:r>
+              <a:rPr sz="1500" b="1" i="0">
+                <a:solidFill>
+                  <a:srgbClr val="3A3D40"/>
+                </a:solidFill>
+                <a:latin typeface="Verdana"/>
+              </a:rPr>
+              <a:t>une tuque noire</a:t>
+            </a:r>
+            <a:r>
+              <a:rPr sz="1500" b="0" i="0">
+                <a:solidFill>
+                  <a:srgbClr val="3A3D40"/>
+                </a:solidFill>
+                <a:latin typeface="Verdana"/>
+              </a:rPr>
+              <a:t>, </a:t>
+            </a:r>
+            <a:r>
+              <a:rPr sz="1500" b="1" i="0">
+                <a:solidFill>
+                  <a:srgbClr val="3A3D40"/>
+                </a:solidFill>
+                <a:latin typeface="Verdana"/>
+              </a:rPr>
+              <a:t>une jupe verte</a:t>
+            </a:r>
+            <a:r>
+              <a:rPr sz="1500" b="0" i="0">
+                <a:solidFill>
+                  <a:srgbClr val="3A3D40"/>
+                </a:solidFill>
+                <a:latin typeface="Verdana"/>
+              </a:rPr>
+              <a:t>. Et souvent, la consonne d'avant se met à sonner : « gri » devient « grize ».</a:t>
             </a:r>
           </a:p>
         </p:txBody>
@@ -9647,7 +9791,43 @@
                 </a:solidFill>
                 <a:latin typeface="Verdana"/>
               </a:rPr>
-              <a:t>On ajoute un s : &lt;b&gt;des bottes noires&lt;/b&gt;, &lt;b&gt;des gants gris&lt;/b&gt;. Il ne s'entend pas — mais une liste, une étiquette et un courriel s'écrivent.</a:t>
+              <a:t>On ajoute un s : </a:t>
+            </a:r>
+            <a:r>
+              <a:rPr sz="1500" b="1" i="0">
+                <a:solidFill>
+                  <a:srgbClr val="3A3D40"/>
+                </a:solidFill>
+                <a:latin typeface="Verdana"/>
+              </a:rPr>
+              <a:t>des bottes noires</a:t>
+            </a:r>
+            <a:r>
+              <a:rPr sz="1500" b="0" i="0">
+                <a:solidFill>
+                  <a:srgbClr val="3A3D40"/>
+                </a:solidFill>
+                <a:latin typeface="Verdana"/>
+              </a:rPr>
+              <a:t>, </a:t>
+            </a:r>
+            <a:r>
+              <a:rPr sz="1500" b="1" i="0">
+                <a:solidFill>
+                  <a:srgbClr val="3A3D40"/>
+                </a:solidFill>
+                <a:latin typeface="Verdana"/>
+              </a:rPr>
+              <a:t>des gants gris</a:t>
+            </a:r>
+            <a:r>
+              <a:rPr sz="1500" b="0" i="0">
+                <a:solidFill>
+                  <a:srgbClr val="3A3D40"/>
+                </a:solidFill>
+                <a:latin typeface="Verdana"/>
+              </a:rPr>
+              <a:t>. Il ne s'entend pas — mais une liste, une étiquette et un courriel s'écrivent.</a:t>
             </a:r>
           </a:p>
         </p:txBody>
@@ -9909,7 +10089,34 @@
                 </a:solidFill>
                 <a:latin typeface="Verdana"/>
               </a:rPr>
-              <a:t>des mitaines &lt;b&gt;bleu pâle&lt;/b&gt;, un manteau &lt;b&gt;gris foncé&lt;/b&gt;</a:t>
+              <a:t>des mitaines </a:t>
+            </a:r>
+            <a:r>
+              <a:rPr sz="3400" b="1" i="0">
+                <a:solidFill>
+                  <a:srgbClr val="17181A"/>
+                </a:solidFill>
+                <a:latin typeface="Verdana"/>
+              </a:rPr>
+              <a:t>bleu pâle</a:t>
+            </a:r>
+            <a:r>
+              <a:rPr sz="3400" b="0" i="0">
+                <a:solidFill>
+                  <a:srgbClr val="17181A"/>
+                </a:solidFill>
+                <a:latin typeface="Verdana"/>
+              </a:rPr>
+              <a:t>, un manteau </a:t>
+            </a:r>
+            <a:r>
+              <a:rPr sz="3400" b="1" i="0">
+                <a:solidFill>
+                  <a:srgbClr val="17181A"/>
+                </a:solidFill>
+                <a:latin typeface="Verdana"/>
+              </a:rPr>
+              <a:t>gris foncé</a:t>
             </a:r>
           </a:p>
         </p:txBody>
